--- a/assets/pptx/catalog-623.pptx
+++ b/assets/pptx/catalog-623.pptx
@@ -3833,7 +3833,7 @@
                 <a:ea typeface="Ebrima"/>
                 <a:cs typeface="Ebrima"/>
               </a:rPr>
-              <a:t>የኤልያስ አምላክ አትርቅም (አትጠፋም) ከጎኔ</a:t>
+              <a:t>የኤልያስ አምላክ አትርቅም አትጠፋም ከጎኔ</a:t>
             </a:r>
           </a:p>
           <a:p>
